--- a/ex31/2026-08-21_AEC-LA-VLM-build.pptx
+++ b/ex31/2026-08-21_AEC-LA-VLM-build.pptx
@@ -8047,7 +8047,15 @@
             </a:r>
             <a:r>
               <a:rPr lang="en-US" dirty="0"/>
-              <a:t>/subharya83/portfolio/blob/master/presentations/2026-08-21_AEC-LA-VLM-build.ipynb</a:t>
+              <a:t>/subharya83/</a:t>
+            </a:r>
+            <a:r>
+              <a:rPr lang="en-US" dirty="0" err="1"/>
+              <a:t>cvml</a:t>
+            </a:r>
+            <a:r>
+              <a:rPr lang="en-US" dirty="0"/>
+              <a:t>-exercise/tree/main/ex31</a:t>
             </a:r>
           </a:p>
         </p:txBody>
